--- a/SPM_BFKIII/ro/fisiere/C02.pptx
+++ b/SPM_BFKIII/ro/fisiere/C02.pptx
@@ -17268,7 +17268,7 @@
                 <a:ea typeface="Palatino Linotype" pitchFamily="34" charset="-122"/>
                 <a:cs typeface="Palatino Linotype" pitchFamily="34" charset="-120"/>
               </a:rPr>
-              <a:t>CONTRACTUL-CADRU · NIVELURILE DE ASISTENȚĂ</a:t>
+              <a:t>CONTRACTUL-CADRU · TIPURILE DE ASISTENȚĂ ȘI DE SERVICII</a:t>
             </a:r>
             <a:endParaRPr lang="en-US" sz="1300" dirty="0"/>
           </a:p>
@@ -18382,7 +18382,7 @@
                 <a:ea typeface="Palatino Linotype" pitchFamily="34" charset="-122"/>
                 <a:cs typeface="Palatino Linotype" pitchFamily="34" charset="-120"/>
               </a:rPr>
-              <a:t>Recuperarea nu e un nivel separat de asistență: le traversează pe cele existente.</a:t>
+              <a:t>Rândurile sunt capitole, nu niveluri: recuperarea are capitole proprii, dar traversează nivelurile de asistență, de la cea primară la spital.</a:t>
             </a:r>
             <a:endParaRPr lang="en-US" sz="1550" dirty="0"/>
           </a:p>
@@ -21071,8 +21071,8 @@
         </p:nvSpPr>
         <p:spPr>
           <a:xfrm>
-            <a:off x="4023360" y="1936699"/>
-            <a:ext cx="1097280" cy="2726741"/>
+            <a:off x="4023360" y="1876349"/>
+            <a:ext cx="1097280" cy="2787091"/>
           </a:xfrm>
           <a:prstGeom prst="rect">
             <a:avLst/>
@@ -21100,7 +21100,7 @@
         </p:nvSpPr>
         <p:spPr>
           <a:xfrm>
-            <a:off x="3749040" y="1525219"/>
+            <a:off x="3749040" y="1464869"/>
             <a:ext cx="1645920" cy="365760"/>
           </a:xfrm>
           <a:prstGeom prst="rect">
@@ -21125,7 +21125,7 @@
                 <a:ea typeface="Palatino Linotype" pitchFamily="34" charset="-122"/>
                 <a:cs typeface="Palatino Linotype" pitchFamily="34" charset="-120"/>
               </a:rPr>
-              <a:t>9,94%</a:t>
+              <a:t>10,16%</a:t>
             </a:r>
             <a:endParaRPr lang="en-US" sz="1700" dirty="0"/>
           </a:p>
@@ -21164,7 +21164,7 @@
                 <a:ea typeface="Palatino Linotype" pitchFamily="34" charset="-122"/>
                 <a:cs typeface="Palatino Linotype" pitchFamily="34" charset="-120"/>
               </a:rPr>
-              <a:t>UE 2023</a:t>
+              <a:t>UE 2024</a:t>
             </a:r>
             <a:endParaRPr lang="en-US" sz="1300" dirty="0"/>
           </a:p>
@@ -21417,7 +21417,7 @@
                 <a:ea typeface="Palatino Linotype" pitchFamily="34" charset="-122"/>
                 <a:cs typeface="Palatino Linotype" pitchFamily="34" charset="-120"/>
               </a:rPr>
-              <a:t>UE 2023</a:t>
+              <a:t>UE 2024</a:t>
             </a:r>
             <a:endParaRPr lang="en-US" sz="1400" dirty="0"/>
           </a:p>
@@ -21432,7 +21432,7 @@
         <p:spPr>
           <a:xfrm>
             <a:off x="8229600" y="3127248"/>
-            <a:ext cx="2640714" cy="365760"/>
+            <a:ext cx="2644335" cy="365760"/>
           </a:xfrm>
           <a:prstGeom prst="rect">
             <a:avLst/>
@@ -21460,7 +21460,7 @@
         </p:nvSpPr>
         <p:spPr>
           <a:xfrm>
-            <a:off x="10943466" y="3081528"/>
+            <a:off x="10947087" y="3081528"/>
             <a:ext cx="914400" cy="457200"/>
           </a:xfrm>
           <a:prstGeom prst="rect">
@@ -21485,7 +21485,7 @@
                 <a:ea typeface="Palatino Linotype" pitchFamily="34" charset="-122"/>
                 <a:cs typeface="Palatino Linotype" pitchFamily="34" charset="-120"/>
               </a:rPr>
-              <a:t>80,22%</a:t>
+              <a:t>80,33%</a:t>
             </a:r>
             <a:endParaRPr lang="en-US" sz="1400" dirty="0"/>
           </a:p>
@@ -21670,7 +21670,7 @@
                 <a:ea typeface="Palatino Linotype" pitchFamily="34" charset="-122"/>
                 <a:cs typeface="Palatino Linotype" pitchFamily="34" charset="-120"/>
               </a:rPr>
-              <a:t>UE 2023</a:t>
+              <a:t>UE 2024</a:t>
             </a:r>
             <a:endParaRPr lang="en-US" sz="1400" dirty="0"/>
           </a:p>
@@ -21685,7 +21685,7 @@
         <p:spPr>
           <a:xfrm>
             <a:off x="8229600" y="4764024"/>
-            <a:ext cx="500030" cy="365760"/>
+            <a:ext cx="495751" cy="365760"/>
           </a:xfrm>
           <a:prstGeom prst="rect">
             <a:avLst/>
@@ -21713,7 +21713,7 @@
         </p:nvSpPr>
         <p:spPr>
           <a:xfrm>
-            <a:off x="8802782" y="4718304"/>
+            <a:off x="8798503" y="4718304"/>
             <a:ext cx="914400" cy="457200"/>
           </a:xfrm>
           <a:prstGeom prst="rect">
@@ -21738,7 +21738,7 @@
                 <a:ea typeface="Palatino Linotype" pitchFamily="34" charset="-122"/>
                 <a:cs typeface="Palatino Linotype" pitchFamily="34" charset="-120"/>
               </a:rPr>
-              <a:t>15,19%</a:t>
+              <a:t>15,06%</a:t>
             </a:r>
             <a:endParaRPr lang="en-US" sz="1400" dirty="0"/>
           </a:p>
@@ -21777,7 +21777,7 @@
                 <a:ea typeface="Palatino Linotype" pitchFamily="34" charset="-122"/>
                 <a:cs typeface="Palatino Linotype" pitchFamily="34" charset="-120"/>
               </a:rPr>
-              <a:t>Comparația cu UE se face pe 2023: valoarea europeană pentru 2024 nu era publicată la extragere.</a:t>
+              <a:t>Comparația cu UE se face pe același an, 2024.</a:t>
             </a:r>
             <a:endParaRPr lang="en-US" sz="1400" dirty="0"/>
           </a:p>
@@ -21965,7 +21965,7 @@
                 <a:ea typeface="Palatino Linotype" pitchFamily="34" charset="-122"/>
                 <a:cs typeface="Palatino Linotype" pitchFamily="34" charset="-120"/>
               </a:rPr>
-              <a:t>din cheltuielile curente cu sănătatea au fost plătite direct de gospodării (22,96% în 2023; UE: 15,19% în 2023).</a:t>
+              <a:t>din cheltuielile curente cu sănătatea au fost plătite direct de gospodării (22,96% în 2023; UE: 15,06% în 2024).</a:t>
             </a:r>
             <a:endParaRPr lang="en-US" sz="1700" dirty="0"/>
           </a:p>
@@ -29691,7 +29691,7 @@
                 <a:ea typeface="Palatino Linotype" pitchFamily="34" charset="-122"/>
                 <a:cs typeface="Palatino Linotype" pitchFamily="34" charset="-120"/>
               </a:rPr>
-              <a:t>−  </a:t>
+              <a:t>−  Paliativă și temporară, nu radicală; depistare costisitoare; potențial limitat: predicția slabă, iar mulți oameni cu risc mic dau mai multe cazuri; nepotrivită comportamental: obiceiurile țin de normele sociale (Rose, tabelul 2).</a:t>
             </a:r>
             <a:pPr indent="0" marL="0">
               <a:buNone/>
@@ -29705,7 +29705,7 @@
                 <a:ea typeface="Palatino Linotype" pitchFamily="34" charset="-122"/>
                 <a:cs typeface="Palatino Linotype" pitchFamily="34" charset="-120"/>
               </a:rPr>
-              <a:t>Paliativă și temporară, nu radicală; depistare costisitoare; potențial limitat: mulți oameni cu risc mic dau mai multe cazuri (Rose, tabelul 2).</a:t>
+              <a:t/>
             </a:r>
             <a:endParaRPr lang="en-US" sz="1550" dirty="0"/>
           </a:p>
